--- a/Operating System/Mids/Slides/Lecture # 2.pptx
+++ b/Operating System/Mids/Slides/Lecture # 2.pptx
@@ -7,7 +7,7 @@
     <p:sldMasterId id="2147483684" r:id="rId3"/>
   </p:sldMasterIdLst>
   <p:notesMasterIdLst>
-    <p:notesMasterId r:id="rId19"/>
+    <p:notesMasterId r:id="rId18"/>
   </p:notesMasterIdLst>
   <p:sldIdLst>
     <p:sldId id="273" r:id="rId4"/>
@@ -24,7 +24,6 @@
     <p:sldId id="975" r:id="rId15"/>
     <p:sldId id="976" r:id="rId16"/>
     <p:sldId id="977" r:id="rId17"/>
-    <p:sldId id="962" r:id="rId18"/>
   </p:sldIdLst>
   <p:sldSz cx="12192000" cy="6858000"/>
   <p:notesSz cx="6858000" cy="9144000"/>
@@ -125,7 +124,7 @@
   </p:defaultTextStyle>
   <p:extLst>
     <p:ext uri="{EFAFB233-063F-42B5-8137-9DF3F51BA10A}">
-      <p15:sldGuideLst xmlns="" xmlns:p15="http://schemas.microsoft.com/office/powerpoint/2012/main">
+      <p15:sldGuideLst xmlns:p15="http://schemas.microsoft.com/office/powerpoint/2012/main">
         <p15:guide id="1" orient="horz" pos="2160" userDrawn="1">
           <p15:clr>
             <a:srgbClr val="A4A3A4"/>
@@ -224,7 +223,7 @@
           <a:p>
             <a:fld id="{AFFDD3B8-2E01-4CE0-B02F-91BFC8CDC8FD}" type="datetimeFigureOut">
               <a:rPr lang="en-US" smtClean="0"/>
-              <a:t>2/18/2025</a:t>
+              <a:t>4/8/2025</a:t>
             </a:fld>
             <a:endParaRPr lang="en-US"/>
           </a:p>
@@ -288,38 +287,37 @@
           <a:p>
             <a:pPr lvl="0"/>
             <a:r>
-              <a:rPr lang="en-US" smtClean="0"/>
+              <a:rPr lang="en-US"/>
               <a:t>Click to edit Master text styles</a:t>
             </a:r>
           </a:p>
           <a:p>
             <a:pPr lvl="1"/>
             <a:r>
-              <a:rPr lang="en-US" smtClean="0"/>
+              <a:rPr lang="en-US"/>
               <a:t>Second level</a:t>
             </a:r>
           </a:p>
           <a:p>
             <a:pPr lvl="2"/>
             <a:r>
-              <a:rPr lang="en-US" smtClean="0"/>
+              <a:rPr lang="en-US"/>
               <a:t>Third level</a:t>
             </a:r>
           </a:p>
           <a:p>
             <a:pPr lvl="3"/>
             <a:r>
-              <a:rPr lang="en-US" smtClean="0"/>
+              <a:rPr lang="en-US"/>
               <a:t>Fourth level</a:t>
             </a:r>
           </a:p>
           <a:p>
             <a:pPr lvl="4"/>
             <a:r>
-              <a:rPr lang="en-US" smtClean="0"/>
+              <a:rPr lang="en-US"/>
               <a:t>Fifth level</a:t>
             </a:r>
-            <a:endParaRPr lang="en-US"/>
           </a:p>
         </p:txBody>
       </p:sp>
@@ -623,7 +621,7 @@
           <a:p>
             <a:fld id="{3237A82C-AEEE-48DB-A866-3B1CA0AC9D5D}" type="datetimeFigureOut">
               <a:rPr lang="x-none" smtClean="0"/>
-              <a:t>2/18/2025</a:t>
+              <a:t>4/8/2025</a:t>
             </a:fld>
             <a:endParaRPr lang="x-none"/>
           </a:p>
@@ -788,7 +786,7 @@
           <a:p>
             <a:fld id="{3237A82C-AEEE-48DB-A866-3B1CA0AC9D5D}" type="datetimeFigureOut">
               <a:rPr lang="x-none" smtClean="0"/>
-              <a:t>2/18/2025</a:t>
+              <a:t>4/8/2025</a:t>
             </a:fld>
             <a:endParaRPr lang="x-none"/>
           </a:p>
@@ -963,7 +961,7 @@
           <a:p>
             <a:fld id="{3237A82C-AEEE-48DB-A866-3B1CA0AC9D5D}" type="datetimeFigureOut">
               <a:rPr lang="x-none" smtClean="0"/>
-              <a:t>2/18/2025</a:t>
+              <a:t>4/8/2025</a:t>
             </a:fld>
             <a:endParaRPr lang="x-none"/>
           </a:p>
@@ -1061,7 +1059,7 @@
           </a:lstStyle>
           <a:p>
             <a:r>
-              <a:rPr lang="en-US" smtClean="0"/>
+              <a:rPr lang="en-US"/>
               <a:t>Click to edit Master title style</a:t>
             </a:r>
             <a:endParaRPr lang="x-none"/>
@@ -1126,7 +1124,7 @@
           </a:lstStyle>
           <a:p>
             <a:r>
-              <a:rPr lang="en-US" smtClean="0"/>
+              <a:rPr lang="en-US"/>
               <a:t>Click to edit Master subtitle style</a:t>
             </a:r>
             <a:endParaRPr lang="x-none"/>
@@ -1150,7 +1148,7 @@
           <a:p>
             <a:fld id="{3237A82C-AEEE-48DB-A866-3B1CA0AC9D5D}" type="datetimeFigureOut">
               <a:rPr lang="x-none" smtClean="0"/>
-              <a:t>2/18/2025</a:t>
+              <a:t>4/8/2025</a:t>
             </a:fld>
             <a:endParaRPr lang="x-none"/>
           </a:p>
@@ -1244,7 +1242,7 @@
           <a:lstStyle/>
           <a:p>
             <a:r>
-              <a:rPr lang="en-US" smtClean="0"/>
+              <a:rPr lang="en-US"/>
               <a:t>Click to edit Master title style</a:t>
             </a:r>
             <a:endParaRPr lang="x-none"/>
@@ -1268,35 +1266,35 @@
           <a:p>
             <a:pPr lvl="0"/>
             <a:r>
-              <a:rPr lang="en-US" smtClean="0"/>
+              <a:rPr lang="en-US"/>
               <a:t>Edit Master text styles</a:t>
             </a:r>
           </a:p>
           <a:p>
             <a:pPr lvl="1"/>
             <a:r>
-              <a:rPr lang="en-US" smtClean="0"/>
+              <a:rPr lang="en-US"/>
               <a:t>Second level</a:t>
             </a:r>
           </a:p>
           <a:p>
             <a:pPr lvl="2"/>
             <a:r>
-              <a:rPr lang="en-US" smtClean="0"/>
+              <a:rPr lang="en-US"/>
               <a:t>Third level</a:t>
             </a:r>
           </a:p>
           <a:p>
             <a:pPr lvl="3"/>
             <a:r>
-              <a:rPr lang="en-US" smtClean="0"/>
+              <a:rPr lang="en-US"/>
               <a:t>Fourth level</a:t>
             </a:r>
           </a:p>
           <a:p>
             <a:pPr lvl="4"/>
             <a:r>
-              <a:rPr lang="en-US" smtClean="0"/>
+              <a:rPr lang="en-US"/>
               <a:t>Fifth level</a:t>
             </a:r>
             <a:endParaRPr lang="x-none"/>
@@ -1320,7 +1318,7 @@
           <a:p>
             <a:fld id="{3237A82C-AEEE-48DB-A866-3B1CA0AC9D5D}" type="datetimeFigureOut">
               <a:rPr lang="x-none" smtClean="0"/>
-              <a:t>2/18/2025</a:t>
+              <a:t>4/8/2025</a:t>
             </a:fld>
             <a:endParaRPr lang="x-none"/>
           </a:p>
@@ -1423,7 +1421,7 @@
           </a:lstStyle>
           <a:p>
             <a:r>
-              <a:rPr lang="en-US" smtClean="0"/>
+              <a:rPr lang="en-US"/>
               <a:t>Click to edit Master title style</a:t>
             </a:r>
             <a:endParaRPr lang="x-none"/>
@@ -1543,7 +1541,7 @@
           <a:p>
             <a:pPr lvl="0"/>
             <a:r>
-              <a:rPr lang="en-US" smtClean="0"/>
+              <a:rPr lang="en-US"/>
               <a:t>Edit Master text styles</a:t>
             </a:r>
           </a:p>
@@ -1566,7 +1564,7 @@
           <a:p>
             <a:fld id="{3237A82C-AEEE-48DB-A866-3B1CA0AC9D5D}" type="datetimeFigureOut">
               <a:rPr lang="x-none" smtClean="0"/>
-              <a:t>2/18/2025</a:t>
+              <a:t>4/8/2025</a:t>
             </a:fld>
             <a:endParaRPr lang="x-none"/>
           </a:p>
@@ -1660,7 +1658,7 @@
           <a:lstStyle/>
           <a:p>
             <a:r>
-              <a:rPr lang="en-US" smtClean="0"/>
+              <a:rPr lang="en-US"/>
               <a:t>Click to edit Master title style</a:t>
             </a:r>
             <a:endParaRPr lang="x-none"/>
@@ -1689,35 +1687,35 @@
           <a:p>
             <a:pPr lvl="0"/>
             <a:r>
-              <a:rPr lang="en-US" smtClean="0"/>
+              <a:rPr lang="en-US"/>
               <a:t>Edit Master text styles</a:t>
             </a:r>
           </a:p>
           <a:p>
             <a:pPr lvl="1"/>
             <a:r>
-              <a:rPr lang="en-US" smtClean="0"/>
+              <a:rPr lang="en-US"/>
               <a:t>Second level</a:t>
             </a:r>
           </a:p>
           <a:p>
             <a:pPr lvl="2"/>
             <a:r>
-              <a:rPr lang="en-US" smtClean="0"/>
+              <a:rPr lang="en-US"/>
               <a:t>Third level</a:t>
             </a:r>
           </a:p>
           <a:p>
             <a:pPr lvl="3"/>
             <a:r>
-              <a:rPr lang="en-US" smtClean="0"/>
+              <a:rPr lang="en-US"/>
               <a:t>Fourth level</a:t>
             </a:r>
           </a:p>
           <a:p>
             <a:pPr lvl="4"/>
             <a:r>
-              <a:rPr lang="en-US" smtClean="0"/>
+              <a:rPr lang="en-US"/>
               <a:t>Fifth level</a:t>
             </a:r>
             <a:endParaRPr lang="x-none"/>
@@ -1746,35 +1744,35 @@
           <a:p>
             <a:pPr lvl="0"/>
             <a:r>
-              <a:rPr lang="en-US" smtClean="0"/>
+              <a:rPr lang="en-US"/>
               <a:t>Edit Master text styles</a:t>
             </a:r>
           </a:p>
           <a:p>
             <a:pPr lvl="1"/>
             <a:r>
-              <a:rPr lang="en-US" smtClean="0"/>
+              <a:rPr lang="en-US"/>
               <a:t>Second level</a:t>
             </a:r>
           </a:p>
           <a:p>
             <a:pPr lvl="2"/>
             <a:r>
-              <a:rPr lang="en-US" smtClean="0"/>
+              <a:rPr lang="en-US"/>
               <a:t>Third level</a:t>
             </a:r>
           </a:p>
           <a:p>
             <a:pPr lvl="3"/>
             <a:r>
-              <a:rPr lang="en-US" smtClean="0"/>
+              <a:rPr lang="en-US"/>
               <a:t>Fourth level</a:t>
             </a:r>
           </a:p>
           <a:p>
             <a:pPr lvl="4"/>
             <a:r>
-              <a:rPr lang="en-US" smtClean="0"/>
+              <a:rPr lang="en-US"/>
               <a:t>Fifth level</a:t>
             </a:r>
             <a:endParaRPr lang="x-none"/>
@@ -1798,7 +1796,7 @@
           <a:p>
             <a:fld id="{3237A82C-AEEE-48DB-A866-3B1CA0AC9D5D}" type="datetimeFigureOut">
               <a:rPr lang="x-none" smtClean="0"/>
-              <a:t>2/18/2025</a:t>
+              <a:t>4/8/2025</a:t>
             </a:fld>
             <a:endParaRPr lang="x-none"/>
           </a:p>
@@ -1897,7 +1895,7 @@
           <a:lstStyle/>
           <a:p>
             <a:r>
-              <a:rPr lang="en-US" smtClean="0"/>
+              <a:rPr lang="en-US"/>
               <a:t>Click to edit Master title style</a:t>
             </a:r>
             <a:endParaRPr lang="x-none"/>
@@ -1963,7 +1961,7 @@
           <a:p>
             <a:pPr lvl="0"/>
             <a:r>
-              <a:rPr lang="en-US" smtClean="0"/>
+              <a:rPr lang="en-US"/>
               <a:t>Edit Master text styles</a:t>
             </a:r>
           </a:p>
@@ -1991,35 +1989,35 @@
           <a:p>
             <a:pPr lvl="0"/>
             <a:r>
-              <a:rPr lang="en-US" smtClean="0"/>
+              <a:rPr lang="en-US"/>
               <a:t>Edit Master text styles</a:t>
             </a:r>
           </a:p>
           <a:p>
             <a:pPr lvl="1"/>
             <a:r>
-              <a:rPr lang="en-US" smtClean="0"/>
+              <a:rPr lang="en-US"/>
               <a:t>Second level</a:t>
             </a:r>
           </a:p>
           <a:p>
             <a:pPr lvl="2"/>
             <a:r>
-              <a:rPr lang="en-US" smtClean="0"/>
+              <a:rPr lang="en-US"/>
               <a:t>Third level</a:t>
             </a:r>
           </a:p>
           <a:p>
             <a:pPr lvl="3"/>
             <a:r>
-              <a:rPr lang="en-US" smtClean="0"/>
+              <a:rPr lang="en-US"/>
               <a:t>Fourth level</a:t>
             </a:r>
           </a:p>
           <a:p>
             <a:pPr lvl="4"/>
             <a:r>
-              <a:rPr lang="en-US" smtClean="0"/>
+              <a:rPr lang="en-US"/>
               <a:t>Fifth level</a:t>
             </a:r>
             <a:endParaRPr lang="x-none"/>
@@ -2085,7 +2083,7 @@
           <a:p>
             <a:pPr lvl="0"/>
             <a:r>
-              <a:rPr lang="en-US" smtClean="0"/>
+              <a:rPr lang="en-US"/>
               <a:t>Edit Master text styles</a:t>
             </a:r>
           </a:p>
@@ -2113,35 +2111,35 @@
           <a:p>
             <a:pPr lvl="0"/>
             <a:r>
-              <a:rPr lang="en-US" smtClean="0"/>
+              <a:rPr lang="en-US"/>
               <a:t>Edit Master text styles</a:t>
             </a:r>
           </a:p>
           <a:p>
             <a:pPr lvl="1"/>
             <a:r>
-              <a:rPr lang="en-US" smtClean="0"/>
+              <a:rPr lang="en-US"/>
               <a:t>Second level</a:t>
             </a:r>
           </a:p>
           <a:p>
             <a:pPr lvl="2"/>
             <a:r>
-              <a:rPr lang="en-US" smtClean="0"/>
+              <a:rPr lang="en-US"/>
               <a:t>Third level</a:t>
             </a:r>
           </a:p>
           <a:p>
             <a:pPr lvl="3"/>
             <a:r>
-              <a:rPr lang="en-US" smtClean="0"/>
+              <a:rPr lang="en-US"/>
               <a:t>Fourth level</a:t>
             </a:r>
           </a:p>
           <a:p>
             <a:pPr lvl="4"/>
             <a:r>
-              <a:rPr lang="en-US" smtClean="0"/>
+              <a:rPr lang="en-US"/>
               <a:t>Fifth level</a:t>
             </a:r>
             <a:endParaRPr lang="x-none"/>
@@ -2165,7 +2163,7 @@
           <a:p>
             <a:fld id="{3237A82C-AEEE-48DB-A866-3B1CA0AC9D5D}" type="datetimeFigureOut">
               <a:rPr lang="x-none" smtClean="0"/>
-              <a:t>2/18/2025</a:t>
+              <a:t>4/8/2025</a:t>
             </a:fld>
             <a:endParaRPr lang="x-none"/>
           </a:p>
@@ -2259,7 +2257,7 @@
           <a:lstStyle/>
           <a:p>
             <a:r>
-              <a:rPr lang="en-US" smtClean="0"/>
+              <a:rPr lang="en-US"/>
               <a:t>Click to edit Master title style</a:t>
             </a:r>
             <a:endParaRPr lang="x-none"/>
@@ -2283,7 +2281,7 @@
           <a:p>
             <a:fld id="{3237A82C-AEEE-48DB-A866-3B1CA0AC9D5D}" type="datetimeFigureOut">
               <a:rPr lang="x-none" smtClean="0"/>
-              <a:t>2/18/2025</a:t>
+              <a:t>4/8/2025</a:t>
             </a:fld>
             <a:endParaRPr lang="x-none"/>
           </a:p>
@@ -2378,7 +2376,7 @@
           <a:p>
             <a:fld id="{3237A82C-AEEE-48DB-A866-3B1CA0AC9D5D}" type="datetimeFigureOut">
               <a:rPr lang="x-none" smtClean="0"/>
-              <a:t>2/18/2025</a:t>
+              <a:t>4/8/2025</a:t>
             </a:fld>
             <a:endParaRPr lang="x-none"/>
           </a:p>
@@ -2481,7 +2479,7 @@
           </a:lstStyle>
           <a:p>
             <a:r>
-              <a:rPr lang="en-US" smtClean="0"/>
+              <a:rPr lang="en-US"/>
               <a:t>Click to edit Master title style</a:t>
             </a:r>
             <a:endParaRPr lang="x-none"/>
@@ -2538,35 +2536,35 @@
           <a:p>
             <a:pPr lvl="0"/>
             <a:r>
-              <a:rPr lang="en-US" smtClean="0"/>
+              <a:rPr lang="en-US"/>
               <a:t>Edit Master text styles</a:t>
             </a:r>
           </a:p>
           <a:p>
             <a:pPr lvl="1"/>
             <a:r>
-              <a:rPr lang="en-US" smtClean="0"/>
+              <a:rPr lang="en-US"/>
               <a:t>Second level</a:t>
             </a:r>
           </a:p>
           <a:p>
             <a:pPr lvl="2"/>
             <a:r>
-              <a:rPr lang="en-US" smtClean="0"/>
+              <a:rPr lang="en-US"/>
               <a:t>Third level</a:t>
             </a:r>
           </a:p>
           <a:p>
             <a:pPr lvl="3"/>
             <a:r>
-              <a:rPr lang="en-US" smtClean="0"/>
+              <a:rPr lang="en-US"/>
               <a:t>Fourth level</a:t>
             </a:r>
           </a:p>
           <a:p>
             <a:pPr lvl="4"/>
             <a:r>
-              <a:rPr lang="en-US" smtClean="0"/>
+              <a:rPr lang="en-US"/>
               <a:t>Fifth level</a:t>
             </a:r>
             <a:endParaRPr lang="x-none"/>
@@ -2632,7 +2630,7 @@
           <a:p>
             <a:pPr lvl="0"/>
             <a:r>
-              <a:rPr lang="en-US" smtClean="0"/>
+              <a:rPr lang="en-US"/>
               <a:t>Edit Master text styles</a:t>
             </a:r>
           </a:p>
@@ -2655,7 +2653,7 @@
           <a:p>
             <a:fld id="{3237A82C-AEEE-48DB-A866-3B1CA0AC9D5D}" type="datetimeFigureOut">
               <a:rPr lang="x-none" smtClean="0"/>
-              <a:t>2/18/2025</a:t>
+              <a:t>4/8/2025</a:t>
             </a:fld>
             <a:endParaRPr lang="x-none"/>
           </a:p>
@@ -2825,7 +2823,7 @@
           <a:p>
             <a:fld id="{3237A82C-AEEE-48DB-A866-3B1CA0AC9D5D}" type="datetimeFigureOut">
               <a:rPr lang="x-none" smtClean="0"/>
-              <a:t>2/18/2025</a:t>
+              <a:t>4/8/2025</a:t>
             </a:fld>
             <a:endParaRPr lang="x-none"/>
           </a:p>
@@ -2923,7 +2921,7 @@
           </a:lstStyle>
           <a:p>
             <a:r>
-              <a:rPr lang="en-US" smtClean="0"/>
+              <a:rPr lang="en-US"/>
               <a:t>Click to edit Master title style</a:t>
             </a:r>
             <a:endParaRPr lang="x-none"/>
@@ -2988,7 +2986,7 @@
           </a:lstStyle>
           <a:p>
             <a:r>
-              <a:rPr lang="en-US" smtClean="0"/>
+              <a:rPr lang="en-US"/>
               <a:t>Click icon to add picture</a:t>
             </a:r>
             <a:endParaRPr lang="x-none"/>
@@ -3054,7 +3052,7 @@
           <a:p>
             <a:pPr lvl="0"/>
             <a:r>
-              <a:rPr lang="en-US" smtClean="0"/>
+              <a:rPr lang="en-US"/>
               <a:t>Edit Master text styles</a:t>
             </a:r>
           </a:p>
@@ -3077,7 +3075,7 @@
           <a:p>
             <a:fld id="{3237A82C-AEEE-48DB-A866-3B1CA0AC9D5D}" type="datetimeFigureOut">
               <a:rPr lang="x-none" smtClean="0"/>
-              <a:t>2/18/2025</a:t>
+              <a:t>4/8/2025</a:t>
             </a:fld>
             <a:endParaRPr lang="x-none"/>
           </a:p>
@@ -3171,7 +3169,7 @@
           <a:lstStyle/>
           <a:p>
             <a:r>
-              <a:rPr lang="en-US" smtClean="0"/>
+              <a:rPr lang="en-US"/>
               <a:t>Click to edit Master title style</a:t>
             </a:r>
             <a:endParaRPr lang="x-none"/>
@@ -3195,35 +3193,35 @@
           <a:p>
             <a:pPr lvl="0"/>
             <a:r>
-              <a:rPr lang="en-US" smtClean="0"/>
+              <a:rPr lang="en-US"/>
               <a:t>Edit Master text styles</a:t>
             </a:r>
           </a:p>
           <a:p>
             <a:pPr lvl="1"/>
             <a:r>
-              <a:rPr lang="en-US" smtClean="0"/>
+              <a:rPr lang="en-US"/>
               <a:t>Second level</a:t>
             </a:r>
           </a:p>
           <a:p>
             <a:pPr lvl="2"/>
             <a:r>
-              <a:rPr lang="en-US" smtClean="0"/>
+              <a:rPr lang="en-US"/>
               <a:t>Third level</a:t>
             </a:r>
           </a:p>
           <a:p>
             <a:pPr lvl="3"/>
             <a:r>
-              <a:rPr lang="en-US" smtClean="0"/>
+              <a:rPr lang="en-US"/>
               <a:t>Fourth level</a:t>
             </a:r>
           </a:p>
           <a:p>
             <a:pPr lvl="4"/>
             <a:r>
-              <a:rPr lang="en-US" smtClean="0"/>
+              <a:rPr lang="en-US"/>
               <a:t>Fifth level</a:t>
             </a:r>
             <a:endParaRPr lang="x-none"/>
@@ -3247,7 +3245,7 @@
           <a:p>
             <a:fld id="{3237A82C-AEEE-48DB-A866-3B1CA0AC9D5D}" type="datetimeFigureOut">
               <a:rPr lang="x-none" smtClean="0"/>
-              <a:t>2/18/2025</a:t>
+              <a:t>4/8/2025</a:t>
             </a:fld>
             <a:endParaRPr lang="x-none"/>
           </a:p>
@@ -3346,7 +3344,7 @@
           <a:lstStyle/>
           <a:p>
             <a:r>
-              <a:rPr lang="en-US" smtClean="0"/>
+              <a:rPr lang="en-US"/>
               <a:t>Click to edit Master title style</a:t>
             </a:r>
             <a:endParaRPr lang="x-none"/>
@@ -3375,35 +3373,35 @@
           <a:p>
             <a:pPr lvl="0"/>
             <a:r>
-              <a:rPr lang="en-US" smtClean="0"/>
+              <a:rPr lang="en-US"/>
               <a:t>Edit Master text styles</a:t>
             </a:r>
           </a:p>
           <a:p>
             <a:pPr lvl="1"/>
             <a:r>
-              <a:rPr lang="en-US" smtClean="0"/>
+              <a:rPr lang="en-US"/>
               <a:t>Second level</a:t>
             </a:r>
           </a:p>
           <a:p>
             <a:pPr lvl="2"/>
             <a:r>
-              <a:rPr lang="en-US" smtClean="0"/>
+              <a:rPr lang="en-US"/>
               <a:t>Third level</a:t>
             </a:r>
           </a:p>
           <a:p>
             <a:pPr lvl="3"/>
             <a:r>
-              <a:rPr lang="en-US" smtClean="0"/>
+              <a:rPr lang="en-US"/>
               <a:t>Fourth level</a:t>
             </a:r>
           </a:p>
           <a:p>
             <a:pPr lvl="4"/>
             <a:r>
-              <a:rPr lang="en-US" smtClean="0"/>
+              <a:rPr lang="en-US"/>
               <a:t>Fifth level</a:t>
             </a:r>
             <a:endParaRPr lang="x-none"/>
@@ -3427,7 +3425,7 @@
           <a:p>
             <a:fld id="{3237A82C-AEEE-48DB-A866-3B1CA0AC9D5D}" type="datetimeFigureOut">
               <a:rPr lang="x-none" smtClean="0"/>
-              <a:t>2/18/2025</a:t>
+              <a:t>4/8/2025</a:t>
             </a:fld>
             <a:endParaRPr lang="x-none"/>
           </a:p>
@@ -3530,7 +3528,7 @@
           </a:lstStyle>
           <a:p>
             <a:r>
-              <a:rPr lang="en-US" smtClean="0"/>
+              <a:rPr lang="en-US"/>
               <a:t>Click to edit Master title style</a:t>
             </a:r>
             <a:endParaRPr lang="x-none"/>
@@ -3595,7 +3593,7 @@
           </a:lstStyle>
           <a:p>
             <a:r>
-              <a:rPr lang="en-US" smtClean="0"/>
+              <a:rPr lang="en-US"/>
               <a:t>Click to edit Master subtitle style</a:t>
             </a:r>
             <a:endParaRPr lang="x-none"/>
@@ -3619,7 +3617,7 @@
           <a:p>
             <a:fld id="{3237A82C-AEEE-48DB-A866-3B1CA0AC9D5D}" type="datetimeFigureOut">
               <a:rPr lang="x-none" smtClean="0"/>
-              <a:t>2/18/2025</a:t>
+              <a:t>4/8/2025</a:t>
             </a:fld>
             <a:endParaRPr lang="x-none"/>
           </a:p>
@@ -3713,7 +3711,7 @@
           <a:lstStyle/>
           <a:p>
             <a:r>
-              <a:rPr lang="en-US" smtClean="0"/>
+              <a:rPr lang="en-US"/>
               <a:t>Click to edit Master title style</a:t>
             </a:r>
             <a:endParaRPr lang="x-none"/>
@@ -3737,35 +3735,35 @@
           <a:p>
             <a:pPr lvl="0"/>
             <a:r>
-              <a:rPr lang="en-US" smtClean="0"/>
+              <a:rPr lang="en-US"/>
               <a:t>Edit Master text styles</a:t>
             </a:r>
           </a:p>
           <a:p>
             <a:pPr lvl="1"/>
             <a:r>
-              <a:rPr lang="en-US" smtClean="0"/>
+              <a:rPr lang="en-US"/>
               <a:t>Second level</a:t>
             </a:r>
           </a:p>
           <a:p>
             <a:pPr lvl="2"/>
             <a:r>
-              <a:rPr lang="en-US" smtClean="0"/>
+              <a:rPr lang="en-US"/>
               <a:t>Third level</a:t>
             </a:r>
           </a:p>
           <a:p>
             <a:pPr lvl="3"/>
             <a:r>
-              <a:rPr lang="en-US" smtClean="0"/>
+              <a:rPr lang="en-US"/>
               <a:t>Fourth level</a:t>
             </a:r>
           </a:p>
           <a:p>
             <a:pPr lvl="4"/>
             <a:r>
-              <a:rPr lang="en-US" smtClean="0"/>
+              <a:rPr lang="en-US"/>
               <a:t>Fifth level</a:t>
             </a:r>
             <a:endParaRPr lang="x-none"/>
@@ -3789,7 +3787,7 @@
           <a:p>
             <a:fld id="{3237A82C-AEEE-48DB-A866-3B1CA0AC9D5D}" type="datetimeFigureOut">
               <a:rPr lang="x-none" smtClean="0"/>
-              <a:t>2/18/2025</a:t>
+              <a:t>4/8/2025</a:t>
             </a:fld>
             <a:endParaRPr lang="x-none"/>
           </a:p>
@@ -3892,7 +3890,7 @@
           </a:lstStyle>
           <a:p>
             <a:r>
-              <a:rPr lang="en-US" smtClean="0"/>
+              <a:rPr lang="en-US"/>
               <a:t>Click to edit Master title style</a:t>
             </a:r>
             <a:endParaRPr lang="x-none"/>
@@ -4012,7 +4010,7 @@
           <a:p>
             <a:pPr lvl="0"/>
             <a:r>
-              <a:rPr lang="en-US" smtClean="0"/>
+              <a:rPr lang="en-US"/>
               <a:t>Edit Master text styles</a:t>
             </a:r>
           </a:p>
@@ -4035,7 +4033,7 @@
           <a:p>
             <a:fld id="{3237A82C-AEEE-48DB-A866-3B1CA0AC9D5D}" type="datetimeFigureOut">
               <a:rPr lang="x-none" smtClean="0"/>
-              <a:t>2/18/2025</a:t>
+              <a:t>4/8/2025</a:t>
             </a:fld>
             <a:endParaRPr lang="x-none"/>
           </a:p>
@@ -4129,7 +4127,7 @@
           <a:lstStyle/>
           <a:p>
             <a:r>
-              <a:rPr lang="en-US" smtClean="0"/>
+              <a:rPr lang="en-US"/>
               <a:t>Click to edit Master title style</a:t>
             </a:r>
             <a:endParaRPr lang="x-none"/>
@@ -4158,35 +4156,35 @@
           <a:p>
             <a:pPr lvl="0"/>
             <a:r>
-              <a:rPr lang="en-US" smtClean="0"/>
+              <a:rPr lang="en-US"/>
               <a:t>Edit Master text styles</a:t>
             </a:r>
           </a:p>
           <a:p>
             <a:pPr lvl="1"/>
             <a:r>
-              <a:rPr lang="en-US" smtClean="0"/>
+              <a:rPr lang="en-US"/>
               <a:t>Second level</a:t>
             </a:r>
           </a:p>
           <a:p>
             <a:pPr lvl="2"/>
             <a:r>
-              <a:rPr lang="en-US" smtClean="0"/>
+              <a:rPr lang="en-US"/>
               <a:t>Third level</a:t>
             </a:r>
           </a:p>
           <a:p>
             <a:pPr lvl="3"/>
             <a:r>
-              <a:rPr lang="en-US" smtClean="0"/>
+              <a:rPr lang="en-US"/>
               <a:t>Fourth level</a:t>
             </a:r>
           </a:p>
           <a:p>
             <a:pPr lvl="4"/>
             <a:r>
-              <a:rPr lang="en-US" smtClean="0"/>
+              <a:rPr lang="en-US"/>
               <a:t>Fifth level</a:t>
             </a:r>
             <a:endParaRPr lang="x-none"/>
@@ -4215,35 +4213,35 @@
           <a:p>
             <a:pPr lvl="0"/>
             <a:r>
-              <a:rPr lang="en-US" smtClean="0"/>
+              <a:rPr lang="en-US"/>
               <a:t>Edit Master text styles</a:t>
             </a:r>
           </a:p>
           <a:p>
             <a:pPr lvl="1"/>
             <a:r>
-              <a:rPr lang="en-US" smtClean="0"/>
+              <a:rPr lang="en-US"/>
               <a:t>Second level</a:t>
             </a:r>
           </a:p>
           <a:p>
             <a:pPr lvl="2"/>
             <a:r>
-              <a:rPr lang="en-US" smtClean="0"/>
+              <a:rPr lang="en-US"/>
               <a:t>Third level</a:t>
             </a:r>
           </a:p>
           <a:p>
             <a:pPr lvl="3"/>
             <a:r>
-              <a:rPr lang="en-US" smtClean="0"/>
+              <a:rPr lang="en-US"/>
               <a:t>Fourth level</a:t>
             </a:r>
           </a:p>
           <a:p>
             <a:pPr lvl="4"/>
             <a:r>
-              <a:rPr lang="en-US" smtClean="0"/>
+              <a:rPr lang="en-US"/>
               <a:t>Fifth level</a:t>
             </a:r>
             <a:endParaRPr lang="x-none"/>
@@ -4267,7 +4265,7 @@
           <a:p>
             <a:fld id="{3237A82C-AEEE-48DB-A866-3B1CA0AC9D5D}" type="datetimeFigureOut">
               <a:rPr lang="x-none" smtClean="0"/>
-              <a:t>2/18/2025</a:t>
+              <a:t>4/8/2025</a:t>
             </a:fld>
             <a:endParaRPr lang="x-none"/>
           </a:p>
@@ -4366,7 +4364,7 @@
           <a:lstStyle/>
           <a:p>
             <a:r>
-              <a:rPr lang="en-US" smtClean="0"/>
+              <a:rPr lang="en-US"/>
               <a:t>Click to edit Master title style</a:t>
             </a:r>
             <a:endParaRPr lang="x-none"/>
@@ -4432,7 +4430,7 @@
           <a:p>
             <a:pPr lvl="0"/>
             <a:r>
-              <a:rPr lang="en-US" smtClean="0"/>
+              <a:rPr lang="en-US"/>
               <a:t>Edit Master text styles</a:t>
             </a:r>
           </a:p>
@@ -4460,35 +4458,35 @@
           <a:p>
             <a:pPr lvl="0"/>
             <a:r>
-              <a:rPr lang="en-US" smtClean="0"/>
+              <a:rPr lang="en-US"/>
               <a:t>Edit Master text styles</a:t>
             </a:r>
           </a:p>
           <a:p>
             <a:pPr lvl="1"/>
             <a:r>
-              <a:rPr lang="en-US" smtClean="0"/>
+              <a:rPr lang="en-US"/>
               <a:t>Second level</a:t>
             </a:r>
           </a:p>
           <a:p>
             <a:pPr lvl="2"/>
             <a:r>
-              <a:rPr lang="en-US" smtClean="0"/>
+              <a:rPr lang="en-US"/>
               <a:t>Third level</a:t>
             </a:r>
           </a:p>
           <a:p>
             <a:pPr lvl="3"/>
             <a:r>
-              <a:rPr lang="en-US" smtClean="0"/>
+              <a:rPr lang="en-US"/>
               <a:t>Fourth level</a:t>
             </a:r>
           </a:p>
           <a:p>
             <a:pPr lvl="4"/>
             <a:r>
-              <a:rPr lang="en-US" smtClean="0"/>
+              <a:rPr lang="en-US"/>
               <a:t>Fifth level</a:t>
             </a:r>
             <a:endParaRPr lang="x-none"/>
@@ -4554,7 +4552,7 @@
           <a:p>
             <a:pPr lvl="0"/>
             <a:r>
-              <a:rPr lang="en-US" smtClean="0"/>
+              <a:rPr lang="en-US"/>
               <a:t>Edit Master text styles</a:t>
             </a:r>
           </a:p>
@@ -4582,35 +4580,35 @@
           <a:p>
             <a:pPr lvl="0"/>
             <a:r>
-              <a:rPr lang="en-US" smtClean="0"/>
+              <a:rPr lang="en-US"/>
               <a:t>Edit Master text styles</a:t>
             </a:r>
           </a:p>
           <a:p>
             <a:pPr lvl="1"/>
             <a:r>
-              <a:rPr lang="en-US" smtClean="0"/>
+              <a:rPr lang="en-US"/>
               <a:t>Second level</a:t>
             </a:r>
           </a:p>
           <a:p>
             <a:pPr lvl="2"/>
             <a:r>
-              <a:rPr lang="en-US" smtClean="0"/>
+              <a:rPr lang="en-US"/>
               <a:t>Third level</a:t>
             </a:r>
           </a:p>
           <a:p>
             <a:pPr lvl="3"/>
             <a:r>
-              <a:rPr lang="en-US" smtClean="0"/>
+              <a:rPr lang="en-US"/>
               <a:t>Fourth level</a:t>
             </a:r>
           </a:p>
           <a:p>
             <a:pPr lvl="4"/>
             <a:r>
-              <a:rPr lang="en-US" smtClean="0"/>
+              <a:rPr lang="en-US"/>
               <a:t>Fifth level</a:t>
             </a:r>
             <a:endParaRPr lang="x-none"/>
@@ -4634,7 +4632,7 @@
           <a:p>
             <a:fld id="{3237A82C-AEEE-48DB-A866-3B1CA0AC9D5D}" type="datetimeFigureOut">
               <a:rPr lang="x-none" smtClean="0"/>
-              <a:t>2/18/2025</a:t>
+              <a:t>4/8/2025</a:t>
             </a:fld>
             <a:endParaRPr lang="x-none"/>
           </a:p>
@@ -4728,7 +4726,7 @@
           <a:lstStyle/>
           <a:p>
             <a:r>
-              <a:rPr lang="en-US" smtClean="0"/>
+              <a:rPr lang="en-US"/>
               <a:t>Click to edit Master title style</a:t>
             </a:r>
             <a:endParaRPr lang="x-none"/>
@@ -4752,7 +4750,7 @@
           <a:p>
             <a:fld id="{3237A82C-AEEE-48DB-A866-3B1CA0AC9D5D}" type="datetimeFigureOut">
               <a:rPr lang="x-none" smtClean="0"/>
-              <a:t>2/18/2025</a:t>
+              <a:t>4/8/2025</a:t>
             </a:fld>
             <a:endParaRPr lang="x-none"/>
           </a:p>
@@ -4847,7 +4845,7 @@
           <a:p>
             <a:fld id="{3237A82C-AEEE-48DB-A866-3B1CA0AC9D5D}" type="datetimeFigureOut">
               <a:rPr lang="x-none" smtClean="0"/>
-              <a:t>2/18/2025</a:t>
+              <a:t>4/8/2025</a:t>
             </a:fld>
             <a:endParaRPr lang="x-none"/>
           </a:p>
@@ -5093,7 +5091,7 @@
           <a:p>
             <a:fld id="{3237A82C-AEEE-48DB-A866-3B1CA0AC9D5D}" type="datetimeFigureOut">
               <a:rPr lang="x-none" smtClean="0"/>
-              <a:t>2/18/2025</a:t>
+              <a:t>4/8/2025</a:t>
             </a:fld>
             <a:endParaRPr lang="x-none"/>
           </a:p>
@@ -5191,7 +5189,7 @@
           </a:lstStyle>
           <a:p>
             <a:r>
-              <a:rPr lang="en-US" smtClean="0"/>
+              <a:rPr lang="en-US"/>
               <a:t>Click to edit Master title style</a:t>
             </a:r>
             <a:endParaRPr lang="x-none"/>
@@ -5248,35 +5246,35 @@
           <a:p>
             <a:pPr lvl="0"/>
             <a:r>
-              <a:rPr lang="en-US" smtClean="0"/>
+              <a:rPr lang="en-US"/>
               <a:t>Edit Master text styles</a:t>
             </a:r>
           </a:p>
           <a:p>
             <a:pPr lvl="1"/>
             <a:r>
-              <a:rPr lang="en-US" smtClean="0"/>
+              <a:rPr lang="en-US"/>
               <a:t>Second level</a:t>
             </a:r>
           </a:p>
           <a:p>
             <a:pPr lvl="2"/>
             <a:r>
-              <a:rPr lang="en-US" smtClean="0"/>
+              <a:rPr lang="en-US"/>
               <a:t>Third level</a:t>
             </a:r>
           </a:p>
           <a:p>
             <a:pPr lvl="3"/>
             <a:r>
-              <a:rPr lang="en-US" smtClean="0"/>
+              <a:rPr lang="en-US"/>
               <a:t>Fourth level</a:t>
             </a:r>
           </a:p>
           <a:p>
             <a:pPr lvl="4"/>
             <a:r>
-              <a:rPr lang="en-US" smtClean="0"/>
+              <a:rPr lang="en-US"/>
               <a:t>Fifth level</a:t>
             </a:r>
             <a:endParaRPr lang="x-none"/>
@@ -5342,7 +5340,7 @@
           <a:p>
             <a:pPr lvl="0"/>
             <a:r>
-              <a:rPr lang="en-US" smtClean="0"/>
+              <a:rPr lang="en-US"/>
               <a:t>Edit Master text styles</a:t>
             </a:r>
           </a:p>
@@ -5365,7 +5363,7 @@
           <a:p>
             <a:fld id="{3237A82C-AEEE-48DB-A866-3B1CA0AC9D5D}" type="datetimeFigureOut">
               <a:rPr lang="x-none" smtClean="0"/>
-              <a:t>2/18/2025</a:t>
+              <a:t>4/8/2025</a:t>
             </a:fld>
             <a:endParaRPr lang="x-none"/>
           </a:p>
@@ -5468,7 +5466,7 @@
           </a:lstStyle>
           <a:p>
             <a:r>
-              <a:rPr lang="en-US" smtClean="0"/>
+              <a:rPr lang="en-US"/>
               <a:t>Click to edit Master title style</a:t>
             </a:r>
             <a:endParaRPr lang="x-none"/>
@@ -5533,7 +5531,7 @@
           </a:lstStyle>
           <a:p>
             <a:r>
-              <a:rPr lang="en-US" smtClean="0"/>
+              <a:rPr lang="en-US"/>
               <a:t>Click icon to add picture</a:t>
             </a:r>
             <a:endParaRPr lang="x-none"/>
@@ -5599,7 +5597,7 @@
           <a:p>
             <a:pPr lvl="0"/>
             <a:r>
-              <a:rPr lang="en-US" smtClean="0"/>
+              <a:rPr lang="en-US"/>
               <a:t>Edit Master text styles</a:t>
             </a:r>
           </a:p>
@@ -5622,7 +5620,7 @@
           <a:p>
             <a:fld id="{3237A82C-AEEE-48DB-A866-3B1CA0AC9D5D}" type="datetimeFigureOut">
               <a:rPr lang="x-none" smtClean="0"/>
-              <a:t>2/18/2025</a:t>
+              <a:t>4/8/2025</a:t>
             </a:fld>
             <a:endParaRPr lang="x-none"/>
           </a:p>
@@ -5716,7 +5714,7 @@
           <a:lstStyle/>
           <a:p>
             <a:r>
-              <a:rPr lang="en-US" smtClean="0"/>
+              <a:rPr lang="en-US"/>
               <a:t>Click to edit Master title style</a:t>
             </a:r>
             <a:endParaRPr lang="x-none"/>
@@ -5740,35 +5738,35 @@
           <a:p>
             <a:pPr lvl="0"/>
             <a:r>
-              <a:rPr lang="en-US" smtClean="0"/>
+              <a:rPr lang="en-US"/>
               <a:t>Edit Master text styles</a:t>
             </a:r>
           </a:p>
           <a:p>
             <a:pPr lvl="1"/>
             <a:r>
-              <a:rPr lang="en-US" smtClean="0"/>
+              <a:rPr lang="en-US"/>
               <a:t>Second level</a:t>
             </a:r>
           </a:p>
           <a:p>
             <a:pPr lvl="2"/>
             <a:r>
-              <a:rPr lang="en-US" smtClean="0"/>
+              <a:rPr lang="en-US"/>
               <a:t>Third level</a:t>
             </a:r>
           </a:p>
           <a:p>
             <a:pPr lvl="3"/>
             <a:r>
-              <a:rPr lang="en-US" smtClean="0"/>
+              <a:rPr lang="en-US"/>
               <a:t>Fourth level</a:t>
             </a:r>
           </a:p>
           <a:p>
             <a:pPr lvl="4"/>
             <a:r>
-              <a:rPr lang="en-US" smtClean="0"/>
+              <a:rPr lang="en-US"/>
               <a:t>Fifth level</a:t>
             </a:r>
             <a:endParaRPr lang="x-none"/>
@@ -5792,7 +5790,7 @@
           <a:p>
             <a:fld id="{3237A82C-AEEE-48DB-A866-3B1CA0AC9D5D}" type="datetimeFigureOut">
               <a:rPr lang="x-none" smtClean="0"/>
-              <a:t>2/18/2025</a:t>
+              <a:t>4/8/2025</a:t>
             </a:fld>
             <a:endParaRPr lang="x-none"/>
           </a:p>
@@ -5891,7 +5889,7 @@
           <a:lstStyle/>
           <a:p>
             <a:r>
-              <a:rPr lang="en-US" smtClean="0"/>
+              <a:rPr lang="en-US"/>
               <a:t>Click to edit Master title style</a:t>
             </a:r>
             <a:endParaRPr lang="x-none"/>
@@ -5920,35 +5918,35 @@
           <a:p>
             <a:pPr lvl="0"/>
             <a:r>
-              <a:rPr lang="en-US" smtClean="0"/>
+              <a:rPr lang="en-US"/>
               <a:t>Edit Master text styles</a:t>
             </a:r>
           </a:p>
           <a:p>
             <a:pPr lvl="1"/>
             <a:r>
-              <a:rPr lang="en-US" smtClean="0"/>
+              <a:rPr lang="en-US"/>
               <a:t>Second level</a:t>
             </a:r>
           </a:p>
           <a:p>
             <a:pPr lvl="2"/>
             <a:r>
-              <a:rPr lang="en-US" smtClean="0"/>
+              <a:rPr lang="en-US"/>
               <a:t>Third level</a:t>
             </a:r>
           </a:p>
           <a:p>
             <a:pPr lvl="3"/>
             <a:r>
-              <a:rPr lang="en-US" smtClean="0"/>
+              <a:rPr lang="en-US"/>
               <a:t>Fourth level</a:t>
             </a:r>
           </a:p>
           <a:p>
             <a:pPr lvl="4"/>
             <a:r>
-              <a:rPr lang="en-US" smtClean="0"/>
+              <a:rPr lang="en-US"/>
               <a:t>Fifth level</a:t>
             </a:r>
             <a:endParaRPr lang="x-none"/>
@@ -5972,7 +5970,7 @@
           <a:p>
             <a:fld id="{3237A82C-AEEE-48DB-A866-3B1CA0AC9D5D}" type="datetimeFigureOut">
               <a:rPr lang="x-none" smtClean="0"/>
-              <a:t>2/18/2025</a:t>
+              <a:t>4/8/2025</a:t>
             </a:fld>
             <a:endParaRPr lang="x-none"/>
           </a:p>
@@ -6204,7 +6202,7 @@
           <a:p>
             <a:fld id="{3237A82C-AEEE-48DB-A866-3B1CA0AC9D5D}" type="datetimeFigureOut">
               <a:rPr lang="x-none" smtClean="0"/>
-              <a:t>2/18/2025</a:t>
+              <a:t>4/8/2025</a:t>
             </a:fld>
             <a:endParaRPr lang="x-none"/>
           </a:p>
@@ -6566,7 +6564,7 @@
           <a:p>
             <a:fld id="{3237A82C-AEEE-48DB-A866-3B1CA0AC9D5D}" type="datetimeFigureOut">
               <a:rPr lang="x-none" smtClean="0"/>
-              <a:t>2/18/2025</a:t>
+              <a:t>4/8/2025</a:t>
             </a:fld>
             <a:endParaRPr lang="x-none"/>
           </a:p>
@@ -6679,7 +6677,7 @@
           <a:p>
             <a:fld id="{3237A82C-AEEE-48DB-A866-3B1CA0AC9D5D}" type="datetimeFigureOut">
               <a:rPr lang="x-none" smtClean="0"/>
-              <a:t>2/18/2025</a:t>
+              <a:t>4/8/2025</a:t>
             </a:fld>
             <a:endParaRPr lang="x-none"/>
           </a:p>
@@ -6769,7 +6767,7 @@
           <a:p>
             <a:fld id="{3237A82C-AEEE-48DB-A866-3B1CA0AC9D5D}" type="datetimeFigureOut">
               <a:rPr lang="x-none" smtClean="0"/>
-              <a:t>2/18/2025</a:t>
+              <a:t>4/8/2025</a:t>
             </a:fld>
             <a:endParaRPr lang="x-none"/>
           </a:p>
@@ -7041,7 +7039,7 @@
           <a:p>
             <a:fld id="{3237A82C-AEEE-48DB-A866-3B1CA0AC9D5D}" type="datetimeFigureOut">
               <a:rPr lang="x-none" smtClean="0"/>
-              <a:t>2/18/2025</a:t>
+              <a:t>4/8/2025</a:t>
             </a:fld>
             <a:endParaRPr lang="x-none"/>
           </a:p>
@@ -7289,7 +7287,7 @@
           <a:p>
             <a:fld id="{3237A82C-AEEE-48DB-A866-3B1CA0AC9D5D}" type="datetimeFigureOut">
               <a:rPr lang="x-none" smtClean="0"/>
-              <a:t>2/18/2025</a:t>
+              <a:t>4/8/2025</a:t>
             </a:fld>
             <a:endParaRPr lang="x-none"/>
           </a:p>
@@ -7497,7 +7495,7 @@
           <a:p>
             <a:fld id="{3237A82C-AEEE-48DB-A866-3B1CA0AC9D5D}" type="datetimeFigureOut">
               <a:rPr lang="x-none" smtClean="0"/>
-              <a:t>2/18/2025</a:t>
+              <a:t>4/8/2025</a:t>
             </a:fld>
             <a:endParaRPr lang="x-none"/>
           </a:p>
@@ -7928,7 +7926,7 @@
           <a:lstStyle/>
           <a:p>
             <a:r>
-              <a:rPr lang="en-US" smtClean="0"/>
+              <a:rPr lang="en-US"/>
               <a:t>Click to edit Master title style</a:t>
             </a:r>
             <a:endParaRPr lang="x-none"/>
@@ -7962,35 +7960,35 @@
           <a:p>
             <a:pPr lvl="0"/>
             <a:r>
-              <a:rPr lang="en-US" smtClean="0"/>
+              <a:rPr lang="en-US"/>
               <a:t>Edit Master text styles</a:t>
             </a:r>
           </a:p>
           <a:p>
             <a:pPr lvl="1"/>
             <a:r>
-              <a:rPr lang="en-US" smtClean="0"/>
+              <a:rPr lang="en-US"/>
               <a:t>Second level</a:t>
             </a:r>
           </a:p>
           <a:p>
             <a:pPr lvl="2"/>
             <a:r>
-              <a:rPr lang="en-US" smtClean="0"/>
+              <a:rPr lang="en-US"/>
               <a:t>Third level</a:t>
             </a:r>
           </a:p>
           <a:p>
             <a:pPr lvl="3"/>
             <a:r>
-              <a:rPr lang="en-US" smtClean="0"/>
+              <a:rPr lang="en-US"/>
               <a:t>Fourth level</a:t>
             </a:r>
           </a:p>
           <a:p>
             <a:pPr lvl="4"/>
             <a:r>
-              <a:rPr lang="en-US" smtClean="0"/>
+              <a:rPr lang="en-US"/>
               <a:t>Fifth level</a:t>
             </a:r>
             <a:endParaRPr lang="x-none"/>
@@ -8032,7 +8030,7 @@
           <a:p>
             <a:fld id="{3237A82C-AEEE-48DB-A866-3B1CA0AC9D5D}" type="datetimeFigureOut">
               <a:rPr lang="x-none" smtClean="0"/>
-              <a:t>2/18/2025</a:t>
+              <a:t>4/8/2025</a:t>
             </a:fld>
             <a:endParaRPr lang="x-none"/>
           </a:p>
@@ -8121,7 +8119,7 @@
           <p:cNvPr id="7" name="Group 6">
             <a:extLst>
               <a:ext uri="{FF2B5EF4-FFF2-40B4-BE49-F238E27FC236}">
-                <a16:creationId xmlns="" xmlns:a16="http://schemas.microsoft.com/office/drawing/2014/main" id="{BAEFE420-0C07-4D1B-9094-F2C452FF1011}"/>
+                <a16:creationId xmlns:a16="http://schemas.microsoft.com/office/drawing/2014/main" id="{BAEFE420-0C07-4D1B-9094-F2C452FF1011}"/>
               </a:ext>
             </a:extLst>
           </p:cNvPr>
@@ -8141,7 +8139,7 @@
             <p:cNvPr id="8" name="Rectangle 7">
               <a:extLst>
                 <a:ext uri="{FF2B5EF4-FFF2-40B4-BE49-F238E27FC236}">
-                  <a16:creationId xmlns="" xmlns:a16="http://schemas.microsoft.com/office/drawing/2014/main" id="{6FBB4837-678E-4FCE-A1B7-2AE1B9432890}"/>
+                  <a16:creationId xmlns:a16="http://schemas.microsoft.com/office/drawing/2014/main" id="{6FBB4837-678E-4FCE-A1B7-2AE1B9432890}"/>
                 </a:ext>
               </a:extLst>
             </p:cNvPr>
@@ -8287,7 +8285,7 @@
             <p:cNvPr id="9" name="Picture 8">
               <a:extLst>
                 <a:ext uri="{FF2B5EF4-FFF2-40B4-BE49-F238E27FC236}">
-                  <a16:creationId xmlns="" xmlns:a16="http://schemas.microsoft.com/office/drawing/2014/main" id="{D279BBF0-3F01-4944-AF8F-73A34B5B9CEF}"/>
+                  <a16:creationId xmlns:a16="http://schemas.microsoft.com/office/drawing/2014/main" id="{D279BBF0-3F01-4944-AF8F-73A34B5B9CEF}"/>
                 </a:ext>
               </a:extLst>
             </p:cNvPr>
@@ -8323,7 +8321,7 @@
             <p:cNvPr id="10" name="TextBox 10">
               <a:extLst>
                 <a:ext uri="{FF2B5EF4-FFF2-40B4-BE49-F238E27FC236}">
-                  <a16:creationId xmlns="" xmlns:a16="http://schemas.microsoft.com/office/drawing/2014/main" id="{650112A7-3B60-423A-8682-3EC1CCAA7ABE}"/>
+                  <a16:creationId xmlns:a16="http://schemas.microsoft.com/office/drawing/2014/main" id="{650112A7-3B60-423A-8682-3EC1CCAA7ABE}"/>
                 </a:ext>
               </a:extLst>
             </p:cNvPr>
@@ -8461,7 +8459,7 @@
             <p:cNvPr id="11" name="Graphic 11">
               <a:extLst>
                 <a:ext uri="{FF2B5EF4-FFF2-40B4-BE49-F238E27FC236}">
-                  <a16:creationId xmlns="" xmlns:a16="http://schemas.microsoft.com/office/drawing/2014/main" id="{75FFEA7F-8809-458D-BE80-99F7CFB965CA}"/>
+                  <a16:creationId xmlns:a16="http://schemas.microsoft.com/office/drawing/2014/main" id="{75FFEA7F-8809-458D-BE80-99F7CFB965CA}"/>
                 </a:ext>
               </a:extLst>
             </p:cNvPr>
@@ -8474,7 +8472,7 @@
             <a:blip r:embed="rId14">
               <a:extLst>
                 <a:ext uri="{96DAC541-7B7A-43D3-8B79-37D633B846F1}">
-                  <asvg:svgBlip xmlns="" xmlns:asvg="http://schemas.microsoft.com/office/drawing/2016/SVG/main" xmlns:lc="http://schemas.openxmlformats.org/drawingml/2006/lockedCanvas" r:embed="rId15"/>
+                  <asvg:svgBlip xmlns:asvg="http://schemas.microsoft.com/office/drawing/2016/SVG/main" r:embed="rId15"/>
                 </a:ext>
               </a:extLst>
             </a:blip>
@@ -8497,7 +8495,7 @@
             <p:cNvPr id="12" name="TextBox 12">
               <a:extLst>
                 <a:ext uri="{FF2B5EF4-FFF2-40B4-BE49-F238E27FC236}">
-                  <a16:creationId xmlns="" xmlns:a16="http://schemas.microsoft.com/office/drawing/2014/main" id="{B3F075CD-8CB0-4BD0-B756-BA559BF9DF2D}"/>
+                  <a16:creationId xmlns:a16="http://schemas.microsoft.com/office/drawing/2014/main" id="{B3F075CD-8CB0-4BD0-B756-BA559BF9DF2D}"/>
                 </a:ext>
               </a:extLst>
             </p:cNvPr>
@@ -8726,7 +8724,7 @@
             <p:cNvPr id="13" name="Graphic 13">
               <a:extLst>
                 <a:ext uri="{FF2B5EF4-FFF2-40B4-BE49-F238E27FC236}">
-                  <a16:creationId xmlns="" xmlns:a16="http://schemas.microsoft.com/office/drawing/2014/main" id="{ACED766F-A0E3-4D45-8A6E-86CCFAFA5D96}"/>
+                  <a16:creationId xmlns:a16="http://schemas.microsoft.com/office/drawing/2014/main" id="{ACED766F-A0E3-4D45-8A6E-86CCFAFA5D96}"/>
                 </a:ext>
               </a:extLst>
             </p:cNvPr>
@@ -8739,7 +8737,7 @@
             <a:blip r:embed="rId16">
               <a:extLst>
                 <a:ext uri="{96DAC541-7B7A-43D3-8B79-37D633B846F1}">
-                  <asvg:svgBlip xmlns="" xmlns:asvg="http://schemas.microsoft.com/office/drawing/2016/SVG/main" xmlns:lc="http://schemas.openxmlformats.org/drawingml/2006/lockedCanvas" r:embed="rId17"/>
+                  <asvg:svgBlip xmlns:asvg="http://schemas.microsoft.com/office/drawing/2016/SVG/main" r:embed="rId17"/>
                 </a:ext>
               </a:extLst>
             </a:blip>
@@ -8762,7 +8760,7 @@
             <p:cNvPr id="14" name="Picture 13">
               <a:extLst>
                 <a:ext uri="{FF2B5EF4-FFF2-40B4-BE49-F238E27FC236}">
-                  <a16:creationId xmlns="" xmlns:a16="http://schemas.microsoft.com/office/drawing/2014/main" id="{F83660F3-45D1-4CA0-BE2A-E7E6C1B794A4}"/>
+                  <a16:creationId xmlns:a16="http://schemas.microsoft.com/office/drawing/2014/main" id="{F83660F3-45D1-4CA0-BE2A-E7E6C1B794A4}"/>
                 </a:ext>
               </a:extLst>
             </p:cNvPr>
@@ -9146,7 +9144,7 @@
           <a:lstStyle/>
           <a:p>
             <a:r>
-              <a:rPr lang="en-US" smtClean="0"/>
+              <a:rPr lang="en-US"/>
               <a:t>Click to edit Master title style</a:t>
             </a:r>
             <a:endParaRPr lang="x-none"/>
@@ -9180,35 +9178,35 @@
           <a:p>
             <a:pPr lvl="0"/>
             <a:r>
-              <a:rPr lang="en-US" smtClean="0"/>
+              <a:rPr lang="en-US"/>
               <a:t>Edit Master text styles</a:t>
             </a:r>
           </a:p>
           <a:p>
             <a:pPr lvl="1"/>
             <a:r>
-              <a:rPr lang="en-US" smtClean="0"/>
+              <a:rPr lang="en-US"/>
               <a:t>Second level</a:t>
             </a:r>
           </a:p>
           <a:p>
             <a:pPr lvl="2"/>
             <a:r>
-              <a:rPr lang="en-US" smtClean="0"/>
+              <a:rPr lang="en-US"/>
               <a:t>Third level</a:t>
             </a:r>
           </a:p>
           <a:p>
             <a:pPr lvl="3"/>
             <a:r>
-              <a:rPr lang="en-US" smtClean="0"/>
+              <a:rPr lang="en-US"/>
               <a:t>Fourth level</a:t>
             </a:r>
           </a:p>
           <a:p>
             <a:pPr lvl="4"/>
             <a:r>
-              <a:rPr lang="en-US" smtClean="0"/>
+              <a:rPr lang="en-US"/>
               <a:t>Fifth level</a:t>
             </a:r>
             <a:endParaRPr lang="x-none"/>
@@ -9250,7 +9248,7 @@
           <a:p>
             <a:fld id="{3237A82C-AEEE-48DB-A866-3B1CA0AC9D5D}" type="datetimeFigureOut">
               <a:rPr lang="x-none" smtClean="0"/>
-              <a:t>2/18/2025</a:t>
+              <a:t>4/8/2025</a:t>
             </a:fld>
             <a:endParaRPr lang="x-none"/>
           </a:p>
@@ -9710,7 +9708,7 @@
           <a:blip r:embed="rId2">
             <a:extLst>
               <a:ext uri="{96DAC541-7B7A-43D3-8B79-37D633B846F1}">
-                <asvg:svgBlip xmlns="" xmlns:asvg="http://schemas.microsoft.com/office/drawing/2016/SVG/main" r:embed="rId3"/>
+                <asvg:svgBlip xmlns:asvg="http://schemas.microsoft.com/office/drawing/2016/SVG/main" r:embed="rId3"/>
               </a:ext>
             </a:extLst>
           </a:blip>
@@ -9798,11 +9796,6 @@
               </a:rPr>
               <a:t>Types of Operating System</a:t>
             </a:r>
-            <a:endParaRPr lang="en-US" b="1" dirty="0">
-              <a:solidFill>
-                <a:schemeClr val="accent4"/>
-              </a:solidFill>
-            </a:endParaRPr>
           </a:p>
         </p:txBody>
       </p:sp>
@@ -9829,7 +9822,7 @@
           <a:lstStyle/>
           <a:p>
             <a:r>
-              <a:rPr lang="en-US" b="1" dirty="0" smtClean="0">
+              <a:rPr lang="en-US" b="1" dirty="0">
                 <a:solidFill>
                   <a:schemeClr val="accent4"/>
                 </a:solidFill>
@@ -9837,20 +9830,12 @@
               <a:t>Lecture </a:t>
             </a:r>
             <a:r>
-              <a:rPr lang="en-US" b="1" smtClean="0">
+              <a:rPr lang="en-US" b="1">
                 <a:solidFill>
                   <a:schemeClr val="accent4"/>
                 </a:solidFill>
               </a:rPr>
-              <a:t>#</a:t>
-            </a:r>
-            <a:r>
-              <a:rPr lang="en-US" b="1" smtClean="0">
-                <a:solidFill>
-                  <a:schemeClr val="accent4"/>
-                </a:solidFill>
-              </a:rPr>
-              <a:t>2 and 3</a:t>
+              <a:t>#2 and 3</a:t>
             </a:r>
             <a:endParaRPr lang="en-US" b="1" dirty="0">
               <a:solidFill>
@@ -9907,18 +9892,13 @@
           <a:p>
             <a:pPr algn="ctr"/>
             <a:r>
-              <a:rPr lang="en-US" b="1" dirty="0" smtClean="0">
+              <a:rPr lang="en-US" b="1" dirty="0">
                 <a:solidFill>
                   <a:schemeClr val="accent4"/>
                 </a:solidFill>
               </a:rPr>
               <a:t>Punch Card</a:t>
             </a:r>
-            <a:endParaRPr lang="en-US" b="1" dirty="0">
-              <a:solidFill>
-                <a:schemeClr val="accent4"/>
-              </a:solidFill>
-            </a:endParaRPr>
           </a:p>
         </p:txBody>
       </p:sp>
@@ -10007,18 +9987,13 @@
           <a:p>
             <a:pPr algn="ctr"/>
             <a:r>
-              <a:rPr lang="en-US" b="1" dirty="0" smtClean="0">
+              <a:rPr lang="en-US" b="1" dirty="0">
                 <a:solidFill>
                   <a:schemeClr val="accent4"/>
                 </a:solidFill>
               </a:rPr>
               <a:t>Batch Processing</a:t>
             </a:r>
-            <a:endParaRPr lang="en-US" b="1" dirty="0">
-              <a:solidFill>
-                <a:schemeClr val="accent4"/>
-              </a:solidFill>
-            </a:endParaRPr>
           </a:p>
         </p:txBody>
       </p:sp>
@@ -10104,7 +10079,7 @@
           <a:p>
             <a:pPr algn="ctr"/>
             <a:r>
-              <a:rPr lang="en-US" b="1" dirty="0" smtClean="0">
+              <a:rPr lang="en-US" b="1" dirty="0">
                 <a:solidFill>
                   <a:schemeClr val="accent4"/>
                 </a:solidFill>
@@ -10138,25 +10113,25 @@
           <a:lstStyle/>
           <a:p>
             <a:r>
-              <a:rPr lang="en-US" dirty="0" smtClean="0"/>
+              <a:rPr lang="en-US" dirty="0"/>
               <a:t>Time sharing, or multitasking, is a logical extension of multiprogramming.</a:t>
             </a:r>
           </a:p>
           <a:p>
             <a:r>
-              <a:rPr lang="en-US" dirty="0" smtClean="0"/>
+              <a:rPr lang="en-US" dirty="0"/>
               <a:t>Multiple jobs are executed by switching the CPU between them.</a:t>
             </a:r>
           </a:p>
           <a:p>
             <a:r>
-              <a:rPr lang="en-US" dirty="0" smtClean="0"/>
+              <a:rPr lang="en-US" dirty="0"/>
               <a:t>In this, the CPU time is shared by different processes, so it is called as “Time sharing Systems”.</a:t>
             </a:r>
           </a:p>
           <a:p>
             <a:r>
-              <a:rPr lang="en-US" dirty="0" smtClean="0"/>
+              <a:rPr lang="en-US" dirty="0"/>
               <a:t>Time slice is defined by the OS, for sharing CPU time between processes.</a:t>
             </a:r>
           </a:p>
@@ -10214,7 +10189,7 @@
           <a:p>
             <a:pPr algn="ctr"/>
             <a:r>
-              <a:rPr lang="en-US" b="1" dirty="0" smtClean="0">
+              <a:rPr lang="en-US" b="1" dirty="0">
                 <a:solidFill>
                   <a:schemeClr val="accent4"/>
                 </a:solidFill>
@@ -10251,7 +10226,7 @@
               <a:buChar char="q"/>
             </a:pPr>
             <a:r>
-              <a:rPr lang="en-US" dirty="0" smtClean="0"/>
+              <a:rPr lang="en-US" dirty="0"/>
               <a:t>A real-time operating system is an operating system (OS) intended to serve real-time application by processing data as it comes in, typically without buffering delays.</a:t>
             </a:r>
           </a:p>
@@ -10262,18 +10237,18 @@
               <a:buChar char="q"/>
             </a:pPr>
             <a:r>
-              <a:rPr lang="en-US" dirty="0" smtClean="0"/>
+              <a:rPr lang="en-US" dirty="0"/>
               <a:t>Often used as a control device in a dedicated application such as controlling scientific experiments, medical imaging systems, industrial control systems, and some display systems.</a:t>
             </a:r>
           </a:p>
           <a:p>
             <a:pPr algn="just"/>
             <a:r>
-              <a:rPr lang="en-US" sz="2400" dirty="0" smtClean="0"/>
+              <a:rPr lang="en-US" sz="2400" dirty="0"/>
               <a:t>If it does not produce output in a defined time then the output will be useless</a:t>
             </a:r>
             <a:r>
-              <a:rPr lang="en-US" dirty="0" smtClean="0"/>
+              <a:rPr lang="en-US" dirty="0"/>
               <a:t>.</a:t>
             </a:r>
           </a:p>
@@ -10331,18 +10306,13 @@
           <a:p>
             <a:pPr algn="ctr"/>
             <a:r>
-              <a:rPr lang="en-US" b="1" dirty="0" smtClean="0">
+              <a:rPr lang="en-US" b="1" dirty="0">
                 <a:solidFill>
                   <a:schemeClr val="accent4"/>
                 </a:solidFill>
               </a:rPr>
               <a:t>Time Sharing System</a:t>
             </a:r>
-            <a:endParaRPr lang="en-US" b="1" dirty="0">
-              <a:solidFill>
-                <a:schemeClr val="accent4"/>
-              </a:solidFill>
-            </a:endParaRPr>
           </a:p>
         </p:txBody>
       </p:sp>
@@ -10392,67 +10362,6 @@
 </p:sld>
 </file>
 
-<file path=ppt/slides/slide15.xml><?xml version="1.0" encoding="utf-8"?>
-<p:sld xmlns:a="http://schemas.openxmlformats.org/drawingml/2006/main" xmlns:r="http://schemas.openxmlformats.org/officeDocument/2006/relationships" xmlns:p="http://schemas.openxmlformats.org/presentationml/2006/main">
-  <p:cSld>
-    <p:spTree>
-      <p:nvGrpSpPr>
-        <p:cNvPr id="1" name=""/>
-        <p:cNvGrpSpPr/>
-        <p:nvPr/>
-      </p:nvGrpSpPr>
-      <p:grpSpPr>
-        <a:xfrm>
-          <a:off x="0" y="0"/>
-          <a:ext cx="0" cy="0"/>
-          <a:chOff x="0" y="0"/>
-          <a:chExt cx="0" cy="0"/>
-        </a:xfrm>
-      </p:grpSpPr>
-      <p:sp>
-        <p:nvSpPr>
-          <p:cNvPr id="2" name="Title 1"/>
-          <p:cNvSpPr>
-            <a:spLocks noGrp="1"/>
-          </p:cNvSpPr>
-          <p:nvPr>
-            <p:ph type="title"/>
-          </p:nvPr>
-        </p:nvSpPr>
-        <p:spPr>
-          <a:xfrm>
-            <a:off x="508000" y="3124200"/>
-            <a:ext cx="10871200" cy="990600"/>
-          </a:xfrm>
-        </p:spPr>
-        <p:txBody>
-          <a:bodyPr>
-            <a:noAutofit/>
-          </a:bodyPr>
-          <a:lstStyle/>
-          <a:p>
-            <a:pPr algn="ctr"/>
-            <a:r>
-              <a:rPr lang="en-US" sz="9600" b="1" dirty="0" smtClean="0"/>
-              <a:t>Questions?</a:t>
-            </a:r>
-            <a:endParaRPr lang="en-US" sz="9600" b="1" dirty="0"/>
-          </a:p>
-        </p:txBody>
-      </p:sp>
-    </p:spTree>
-    <p:extLst>
-      <p:ext uri="{BB962C8B-B14F-4D97-AF65-F5344CB8AC3E}">
-        <p14:creationId xmlns:p14="http://schemas.microsoft.com/office/powerpoint/2010/main" val="1413193520"/>
-      </p:ext>
-    </p:extLst>
-  </p:cSld>
-  <p:clrMapOvr>
-    <a:masterClrMapping/>
-  </p:clrMapOvr>
-</p:sld>
-</file>
-
 <file path=ppt/slides/slide2.xml><?xml version="1.0" encoding="utf-8"?>
 <p:sld xmlns:a="http://schemas.openxmlformats.org/drawingml/2006/main" xmlns:r="http://schemas.openxmlformats.org/officeDocument/2006/relationships" xmlns:p="http://schemas.openxmlformats.org/presentationml/2006/main">
   <p:cSld>
@@ -10492,18 +10401,13 @@
           <a:p>
             <a:pPr algn="ctr"/>
             <a:r>
-              <a:rPr lang="en-US" b="1" dirty="0" smtClean="0">
+              <a:rPr lang="en-US" b="1" dirty="0">
                 <a:solidFill>
                   <a:schemeClr val="accent4"/>
                 </a:solidFill>
               </a:rPr>
               <a:t>Types of Operating System</a:t>
             </a:r>
-            <a:endParaRPr lang="en-US" b="1" dirty="0">
-              <a:solidFill>
-                <a:schemeClr val="accent4"/>
-              </a:solidFill>
-            </a:endParaRPr>
           </a:p>
         </p:txBody>
       </p:sp>
@@ -10523,35 +10427,35 @@
           <a:lstStyle/>
           <a:p>
             <a:r>
-              <a:rPr lang="en-US" dirty="0" smtClean="0"/>
+              <a:rPr lang="en-US" dirty="0"/>
               <a:t>Single User System</a:t>
             </a:r>
           </a:p>
           <a:p>
             <a:r>
-              <a:rPr lang="en-US" dirty="0" smtClean="0"/>
+              <a:rPr lang="en-US" dirty="0"/>
               <a:t>Batch System</a:t>
             </a:r>
           </a:p>
           <a:p>
             <a:r>
-              <a:rPr lang="en-US" dirty="0" err="1" smtClean="0"/>
+              <a:rPr lang="en-US" dirty="0" err="1"/>
               <a:t>Multiprogrammed</a:t>
             </a:r>
             <a:r>
-              <a:rPr lang="en-US" dirty="0" smtClean="0"/>
+              <a:rPr lang="en-US" dirty="0"/>
               <a:t> System</a:t>
             </a:r>
           </a:p>
           <a:p>
             <a:r>
-              <a:rPr lang="en-US" dirty="0" smtClean="0"/>
+              <a:rPr lang="en-US" dirty="0"/>
               <a:t>Time Sharing system</a:t>
             </a:r>
           </a:p>
           <a:p>
             <a:r>
-              <a:rPr lang="en-US" dirty="0" smtClean="0"/>
+              <a:rPr lang="en-US" dirty="0"/>
               <a:t>Real-Time system</a:t>
             </a:r>
           </a:p>
@@ -10609,7 +10513,7 @@
           <a:p>
             <a:pPr algn="ctr"/>
             <a:r>
-              <a:rPr lang="en-US" dirty="0" smtClean="0">
+              <a:rPr lang="en-US" dirty="0">
                 <a:solidFill>
                   <a:schemeClr val="accent4"/>
                 </a:solidFill>
@@ -10644,42 +10548,42 @@
           <a:p>
             <a:pPr algn="just"/>
             <a:r>
-              <a:rPr lang="en-US" dirty="0" smtClean="0"/>
+              <a:rPr lang="en-US" dirty="0"/>
               <a:t>An operating system that is usable by only one user at a time.</a:t>
             </a:r>
           </a:p>
           <a:p>
             <a:pPr algn="just"/>
             <a:r>
-              <a:rPr lang="en-US" dirty="0" smtClean="0"/>
+              <a:rPr lang="en-US" dirty="0"/>
               <a:t>For example: Early p</a:t>
             </a:r>
             <a:r>
-              <a:rPr lang="en-US" i="1" dirty="0" smtClean="0"/>
+              <a:rPr lang="en-US" i="1" dirty="0"/>
               <a:t>ersonal computers</a:t>
             </a:r>
             <a:r>
-              <a:rPr lang="en-US" dirty="0" smtClean="0"/>
+              <a:rPr lang="en-US" dirty="0"/>
               <a:t> </a:t>
             </a:r>
           </a:p>
           <a:p>
             <a:pPr algn="just"/>
             <a:r>
-              <a:rPr lang="en-US" dirty="0" smtClean="0"/>
+              <a:rPr lang="en-US" dirty="0"/>
               <a:t>Interactive (i.e. whenever you want to run a software on a computer system you can interact with it)</a:t>
             </a:r>
           </a:p>
           <a:p>
             <a:pPr algn="just"/>
             <a:r>
-              <a:rPr lang="en-US" dirty="0" smtClean="0"/>
+              <a:rPr lang="en-US" dirty="0"/>
               <a:t>Basic goal of single user system is to be convenient and responsive. (i.e. easy to use, friendly graphics etc.)</a:t>
             </a:r>
           </a:p>
           <a:p>
             <a:pPr algn="just"/>
-            <a:endParaRPr lang="en-US" dirty="0" smtClean="0"/>
+            <a:endParaRPr lang="en-US" dirty="0"/>
           </a:p>
           <a:p>
             <a:pPr algn="just"/>
@@ -10739,18 +10643,13 @@
           <a:p>
             <a:pPr algn="ctr"/>
             <a:r>
-              <a:rPr lang="en-US" b="1" dirty="0" smtClean="0">
+              <a:rPr lang="en-US" b="1" dirty="0">
                 <a:solidFill>
                   <a:schemeClr val="accent4"/>
                 </a:solidFill>
               </a:rPr>
               <a:t>Types of Single User System</a:t>
             </a:r>
-            <a:endParaRPr lang="en-US" b="1" dirty="0">
-              <a:solidFill>
-                <a:schemeClr val="accent4"/>
-              </a:solidFill>
-            </a:endParaRPr>
           </a:p>
         </p:txBody>
       </p:sp>
@@ -10773,7 +10672,7 @@
               <a:buNone/>
             </a:pPr>
             <a:r>
-              <a:rPr lang="en-US" dirty="0" smtClean="0"/>
+              <a:rPr lang="en-US" dirty="0"/>
               <a:t>	Single user operating systems can be split into two types:</a:t>
             </a:r>
           </a:p>
@@ -10782,11 +10681,11 @@
               <a:buNone/>
             </a:pPr>
             <a:r>
-              <a:rPr lang="en-US" b="1" dirty="0" smtClean="0"/>
+              <a:rPr lang="en-US" b="1" dirty="0"/>
               <a:t>1</a:t>
             </a:r>
             <a:r>
-              <a:rPr lang="en-US" dirty="0" smtClean="0"/>
+              <a:rPr lang="en-US" dirty="0"/>
               <a:t>- single user, single task</a:t>
             </a:r>
           </a:p>
@@ -10795,11 +10694,11 @@
               <a:buNone/>
             </a:pPr>
             <a:r>
-              <a:rPr lang="en-US" b="1" dirty="0" smtClean="0"/>
+              <a:rPr lang="en-US" b="1" dirty="0"/>
               <a:t>2</a:t>
             </a:r>
             <a:r>
-              <a:rPr lang="en-US" dirty="0" smtClean="0"/>
+              <a:rPr lang="en-US" dirty="0"/>
               <a:t>- single user, multiple tasks</a:t>
             </a:r>
           </a:p>
@@ -10860,18 +10759,13 @@
           <a:p>
             <a:pPr algn="ctr"/>
             <a:r>
-              <a:rPr lang="en-US" b="1" dirty="0" smtClean="0">
+              <a:rPr lang="en-US" b="1" dirty="0">
                 <a:solidFill>
                   <a:schemeClr val="accent4"/>
                 </a:solidFill>
               </a:rPr>
               <a:t>Types of Single User System</a:t>
             </a:r>
-            <a:endParaRPr lang="en-US" b="1" dirty="0">
-              <a:solidFill>
-                <a:schemeClr val="accent4"/>
-              </a:solidFill>
-            </a:endParaRPr>
           </a:p>
         </p:txBody>
       </p:sp>
@@ -10894,11 +10788,11 @@
           <a:p>
             <a:pPr algn="just"/>
             <a:r>
-              <a:rPr lang="en-US" b="1" dirty="0" smtClean="0"/>
+              <a:rPr lang="en-US" b="1" dirty="0"/>
               <a:t>Single user, single tasks -- </a:t>
             </a:r>
             <a:r>
-              <a:rPr lang="en-US" dirty="0" smtClean="0"/>
+              <a:rPr lang="en-US" dirty="0"/>
               <a:t>This type of operating system only has to deal with one person at a time, running one user application at a time.</a:t>
             </a:r>
           </a:p>
@@ -10907,18 +10801,18 @@
               <a:buNone/>
             </a:pPr>
             <a:r>
-              <a:rPr lang="en-US" dirty="0" smtClean="0"/>
+              <a:rPr lang="en-US" dirty="0"/>
               <a:t>	E.g. Mobile phone</a:t>
             </a:r>
           </a:p>
           <a:p>
             <a:pPr algn="just"/>
             <a:r>
-              <a:rPr lang="en-US" b="1" dirty="0" smtClean="0"/>
+              <a:rPr lang="en-US" b="1" dirty="0"/>
               <a:t>Single user, multiple tasks -- </a:t>
             </a:r>
             <a:r>
-              <a:rPr lang="en-US" dirty="0" smtClean="0"/>
+              <a:rPr lang="en-US" dirty="0"/>
               <a:t>The operating system is designed mainly with a single user in mind, but it can deal with many applications running at the same time. </a:t>
             </a:r>
           </a:p>
@@ -10927,14 +10821,13 @@
               <a:buNone/>
             </a:pPr>
             <a:r>
-              <a:rPr lang="en-US" b="1" dirty="0" smtClean="0"/>
+              <a:rPr lang="en-US" b="1" dirty="0"/>
               <a:t>	</a:t>
             </a:r>
             <a:r>
-              <a:rPr lang="en-US" dirty="0" smtClean="0"/>
+              <a:rPr lang="en-US" dirty="0"/>
               <a:t>E.g. searching the internet, downloading a video file and also listening to a piece of music.</a:t>
             </a:r>
-            <a:endParaRPr lang="en-US" dirty="0"/>
           </a:p>
         </p:txBody>
       </p:sp>
@@ -10992,7 +10885,7 @@
           <a:p>
             <a:pPr algn="ctr"/>
             <a:r>
-              <a:rPr lang="en-US" b="1" dirty="0" smtClean="0">
+              <a:rPr lang="en-US" b="1" dirty="0">
                 <a:solidFill>
                   <a:schemeClr val="accent4"/>
                 </a:solidFill>
@@ -11026,35 +10919,35 @@
           <a:p>
             <a:pPr algn="just"/>
             <a:r>
-              <a:rPr lang="en-US" dirty="0" smtClean="0"/>
+              <a:rPr lang="en-US" dirty="0"/>
               <a:t>Multiprogramming is a technique to execute number of programs simultaneously by a single processor.</a:t>
             </a:r>
           </a:p>
           <a:p>
             <a:pPr algn="just"/>
             <a:r>
-              <a:rPr lang="en-US" dirty="0" smtClean="0"/>
+              <a:rPr lang="en-US" dirty="0"/>
               <a:t>In Multiprogramming, number of processes reside in main memory at a time.</a:t>
             </a:r>
           </a:p>
           <a:p>
             <a:pPr algn="just"/>
             <a:r>
-              <a:rPr lang="en-US" dirty="0" smtClean="0"/>
+              <a:rPr lang="en-US" dirty="0"/>
               <a:t>The OS picks and begins to executes one of the jobs in the main memory.</a:t>
             </a:r>
           </a:p>
           <a:p>
             <a:pPr algn="just"/>
             <a:r>
-              <a:rPr lang="en-US" dirty="0" smtClean="0"/>
+              <a:rPr lang="en-US" dirty="0"/>
               <a:t>If any I/O wait happened in a process, then CPU switches from that job to another job.</a:t>
             </a:r>
           </a:p>
           <a:p>
             <a:pPr algn="just"/>
             <a:r>
-              <a:rPr lang="en-US" dirty="0" smtClean="0"/>
+              <a:rPr lang="en-US" dirty="0"/>
               <a:t>Hence CPU in not idle at any time.</a:t>
             </a:r>
           </a:p>
@@ -11112,18 +11005,13 @@
           <a:p>
             <a:pPr algn="ctr"/>
             <a:r>
-              <a:rPr lang="en-US" dirty="0" smtClean="0">
+              <a:rPr lang="en-US" dirty="0">
                 <a:solidFill>
                   <a:schemeClr val="accent4"/>
                 </a:solidFill>
               </a:rPr>
               <a:t>Multiprogramming</a:t>
             </a:r>
-            <a:endParaRPr lang="en-US" dirty="0">
-              <a:solidFill>
-                <a:schemeClr val="accent4"/>
-              </a:solidFill>
-            </a:endParaRPr>
           </a:p>
         </p:txBody>
       </p:sp>
@@ -11272,18 +11160,13 @@
           <a:p>
             <a:pPr algn="ctr"/>
             <a:r>
-              <a:rPr lang="en-US" b="1" dirty="0" smtClean="0">
+              <a:rPr lang="en-US" b="1" dirty="0">
                 <a:solidFill>
                   <a:schemeClr val="accent4"/>
                 </a:solidFill>
               </a:rPr>
               <a:t>Batch Processing</a:t>
             </a:r>
-            <a:endParaRPr lang="en-US" b="1" dirty="0">
-              <a:solidFill>
-                <a:schemeClr val="accent4"/>
-              </a:solidFill>
-            </a:endParaRPr>
           </a:p>
         </p:txBody>
       </p:sp>
@@ -11304,24 +11187,23 @@
           <a:p>
             <a:pPr algn="just"/>
             <a:r>
-              <a:rPr lang="en-US" dirty="0" smtClean="0"/>
+              <a:rPr lang="en-US" dirty="0"/>
               <a:t>In this type of system, there is no direct interaction between user and the computer. </a:t>
             </a:r>
           </a:p>
           <a:p>
             <a:pPr algn="just"/>
             <a:r>
-              <a:rPr lang="en-US" dirty="0" smtClean="0"/>
+              <a:rPr lang="en-US" dirty="0"/>
               <a:t>The user has to submit a job (written on cards or tape) to a computer operator. </a:t>
             </a:r>
           </a:p>
           <a:p>
             <a:pPr algn="just"/>
             <a:r>
-              <a:rPr lang="en-US" dirty="0" smtClean="0"/>
+              <a:rPr lang="en-US" dirty="0"/>
               <a:t>Each user prepares his job on an off-line device like punch cards and submits it to the computer operator. </a:t>
             </a:r>
-            <a:endParaRPr lang="en-US" dirty="0"/>
           </a:p>
         </p:txBody>
       </p:sp>
@@ -11377,18 +11259,13 @@
           <a:p>
             <a:pPr algn="ctr"/>
             <a:r>
-              <a:rPr lang="en-US" b="1" dirty="0" smtClean="0">
+              <a:rPr lang="en-US" b="1" dirty="0">
                 <a:solidFill>
                   <a:schemeClr val="accent4"/>
                 </a:solidFill>
               </a:rPr>
               <a:t>Cont..</a:t>
             </a:r>
-            <a:endParaRPr lang="en-US" b="1" dirty="0">
-              <a:solidFill>
-                <a:schemeClr val="accent4"/>
-              </a:solidFill>
-            </a:endParaRPr>
           </a:p>
         </p:txBody>
       </p:sp>
@@ -11411,36 +11288,36 @@
           <a:p>
             <a:pPr lvl="0" algn="just"/>
             <a:r>
-              <a:rPr lang="en-US" dirty="0" smtClean="0"/>
+              <a:rPr lang="en-US" dirty="0"/>
               <a:t>OS defines a job which has predefined sequence of commands, programs and data as a single unit.</a:t>
             </a:r>
           </a:p>
           <a:p>
             <a:pPr lvl="0" algn="just"/>
             <a:r>
-              <a:rPr lang="en-US" dirty="0" smtClean="0"/>
+              <a:rPr lang="en-US" dirty="0"/>
               <a:t>OS keeps a number of jobs in memory and executes them without any manual information.</a:t>
             </a:r>
           </a:p>
           <a:p>
             <a:pPr lvl="0" algn="just"/>
             <a:r>
-              <a:rPr lang="en-US" dirty="0" smtClean="0"/>
+              <a:rPr lang="en-US" dirty="0"/>
               <a:t>Jobs are processed in the order of submission </a:t>
             </a:r>
             <a:r>
-              <a:rPr lang="en-US" dirty="0" err="1" smtClean="0"/>
+              <a:rPr lang="en-US" dirty="0" err="1"/>
               <a:t>i.e</a:t>
             </a:r>
             <a:r>
-              <a:rPr lang="en-US" dirty="0" smtClean="0"/>
+              <a:rPr lang="en-US" dirty="0"/>
               <a:t> first come first served fashion.</a:t>
             </a:r>
           </a:p>
           <a:p>
             <a:pPr lvl="0" algn="just"/>
             <a:r>
-              <a:rPr lang="en-US" dirty="0" smtClean="0"/>
+              <a:rPr lang="en-US" dirty="0"/>
               <a:t>When job completes its execution, its memory is released and the output for the job gets copied into an output spool for later printing or processing.</a:t>
             </a:r>
           </a:p>
@@ -11718,7 +11595,7 @@
   <a:extraClrSchemeLst/>
   <a:extLst>
     <a:ext uri="{05A4C25C-085E-4340-85A3-A5531E510DB2}">
-      <thm15:themeFamily xmlns="" xmlns:thm15="http://schemas.microsoft.com/office/thememl/2012/main" name="Office Theme" id="{62F939B6-93AF-4DB8-9C6B-D6C7DFDC589F}" vid="{4A3C46E8-61CC-4603-A589-7422A47A8E4A}"/>
+      <thm15:themeFamily xmlns:thm15="http://schemas.microsoft.com/office/thememl/2012/main" name="Office Theme" id="{62F939B6-93AF-4DB8-9C6B-D6C7DFDC589F}" vid="{4A3C46E8-61CC-4603-A589-7422A47A8E4A}"/>
     </a:ext>
   </a:extLst>
 </a:theme>
@@ -11979,7 +11856,7 @@
   <a:extraClrSchemeLst/>
   <a:extLst>
     <a:ext uri="{05A4C25C-085E-4340-85A3-A5531E510DB2}">
-      <thm15:themeFamily xmlns="" xmlns:thm15="http://schemas.microsoft.com/office/thememl/2012/main" name="Office Theme" id="{62F939B6-93AF-4DB8-9C6B-D6C7DFDC589F}" vid="{4A3C46E8-61CC-4603-A589-7422A47A8E4A}"/>
+      <thm15:themeFamily xmlns:thm15="http://schemas.microsoft.com/office/thememl/2012/main" name="Office Theme" id="{62F939B6-93AF-4DB8-9C6B-D6C7DFDC589F}" vid="{4A3C46E8-61CC-4603-A589-7422A47A8E4A}"/>
     </a:ext>
   </a:extLst>
 </a:theme>
@@ -12240,7 +12117,7 @@
   <a:extraClrSchemeLst/>
   <a:extLst>
     <a:ext uri="{05A4C25C-085E-4340-85A3-A5531E510DB2}">
-      <thm15:themeFamily xmlns="" xmlns:thm15="http://schemas.microsoft.com/office/thememl/2012/main" name="Office Theme" id="{62F939B6-93AF-4DB8-9C6B-D6C7DFDC589F}" vid="{4A3C46E8-61CC-4603-A589-7422A47A8E4A}"/>
+      <thm15:themeFamily xmlns:thm15="http://schemas.microsoft.com/office/thememl/2012/main" name="Office Theme" id="{62F939B6-93AF-4DB8-9C6B-D6C7DFDC589F}" vid="{4A3C46E8-61CC-4603-A589-7422A47A8E4A}"/>
     </a:ext>
   </a:extLst>
 </a:theme>
